--- a/智能估值课程讲义.pptx
+++ b/智能估值课程讲义.pptx
@@ -5,7 +5,7 @@
     <p:sldMasterId id="2147483660" r:id="rId1"/>
   </p:sldMasterIdLst>
   <p:notesMasterIdLst>
-    <p:notesMasterId r:id="rId62"/>
+    <p:notesMasterId r:id="rId68"/>
   </p:notesMasterIdLst>
   <p:sldIdLst>
     <p:sldId id="256" r:id="rId2"/>
@@ -68,6 +68,12 @@
     <p:sldId id="730" r:id="rId59"/>
     <p:sldId id="735" r:id="rId60"/>
     <p:sldId id="734" r:id="rId61"/>
+    <p:sldId id="738" r:id="rId62"/>
+    <p:sldId id="739" r:id="rId63"/>
+    <p:sldId id="741" r:id="rId64"/>
+    <p:sldId id="743" r:id="rId65"/>
+    <p:sldId id="697" r:id="rId66"/>
+    <p:sldId id="303" r:id="rId67"/>
   </p:sldIdLst>
   <p:sldSz cx="12192000" cy="6858000"/>
   <p:notesSz cx="6858000" cy="9144000"/>
@@ -273,7 +279,7 @@
           <a:p>
             <a:fld id="{06C801F0-0EF5-45BB-A914-31086B81E6CD}" type="datetimeFigureOut">
               <a:rPr lang="zh-CN" altLang="en-US" smtClean="0"/>
-              <a:t>2022-02-25</a:t>
+              <a:t>2022-03-01</a:t>
             </a:fld>
             <a:endParaRPr lang="zh-CN" altLang="en-US"/>
           </a:p>
@@ -670,7 +676,7 @@
           <a:p>
             <a:fld id="{B0136D52-5100-4D3E-A318-69490C5EABBE}" type="datetimeFigureOut">
               <a:rPr lang="zh-CN" altLang="en-US" smtClean="0"/>
-              <a:t>2022-02-25</a:t>
+              <a:t>2022-03-01</a:t>
             </a:fld>
             <a:endParaRPr lang="zh-CN" altLang="en-US"/>
           </a:p>
@@ -833,7 +839,7 @@
           <a:p>
             <a:fld id="{B0136D52-5100-4D3E-A318-69490C5EABBE}" type="datetimeFigureOut">
               <a:rPr lang="zh-CN" altLang="en-US" smtClean="0"/>
-              <a:t>2022-02-25</a:t>
+              <a:t>2022-03-01</a:t>
             </a:fld>
             <a:endParaRPr lang="zh-CN" altLang="en-US"/>
           </a:p>
@@ -1006,7 +1012,7 @@
           <a:p>
             <a:fld id="{B0136D52-5100-4D3E-A318-69490C5EABBE}" type="datetimeFigureOut">
               <a:rPr lang="zh-CN" altLang="en-US" smtClean="0"/>
-              <a:t>2022-02-25</a:t>
+              <a:t>2022-03-01</a:t>
             </a:fld>
             <a:endParaRPr lang="zh-CN" altLang="en-US"/>
           </a:p>
@@ -1169,7 +1175,7 @@
           <a:p>
             <a:fld id="{B0136D52-5100-4D3E-A318-69490C5EABBE}" type="datetimeFigureOut">
               <a:rPr lang="zh-CN" altLang="en-US" smtClean="0"/>
-              <a:t>2022-02-25</a:t>
+              <a:t>2022-03-01</a:t>
             </a:fld>
             <a:endParaRPr lang="zh-CN" altLang="en-US"/>
           </a:p>
@@ -1409,7 +1415,7 @@
           <a:p>
             <a:fld id="{B0136D52-5100-4D3E-A318-69490C5EABBE}" type="datetimeFigureOut">
               <a:rPr lang="zh-CN" altLang="en-US" smtClean="0"/>
-              <a:t>2022-02-25</a:t>
+              <a:t>2022-03-01</a:t>
             </a:fld>
             <a:endParaRPr lang="zh-CN" altLang="en-US"/>
           </a:p>
@@ -1633,7 +1639,7 @@
           <a:p>
             <a:fld id="{B0136D52-5100-4D3E-A318-69490C5EABBE}" type="datetimeFigureOut">
               <a:rPr lang="zh-CN" altLang="en-US" smtClean="0"/>
-              <a:t>2022-02-25</a:t>
+              <a:t>2022-03-01</a:t>
             </a:fld>
             <a:endParaRPr lang="zh-CN" altLang="en-US"/>
           </a:p>
@@ -1992,7 +1998,7 @@
           <a:p>
             <a:fld id="{B0136D52-5100-4D3E-A318-69490C5EABBE}" type="datetimeFigureOut">
               <a:rPr lang="zh-CN" altLang="en-US" smtClean="0"/>
-              <a:t>2022-02-25</a:t>
+              <a:t>2022-03-01</a:t>
             </a:fld>
             <a:endParaRPr lang="zh-CN" altLang="en-US"/>
           </a:p>
@@ -2104,7 +2110,7 @@
           <a:p>
             <a:fld id="{B0136D52-5100-4D3E-A318-69490C5EABBE}" type="datetimeFigureOut">
               <a:rPr lang="zh-CN" altLang="en-US" smtClean="0"/>
-              <a:t>2022-02-25</a:t>
+              <a:t>2022-03-01</a:t>
             </a:fld>
             <a:endParaRPr lang="zh-CN" altLang="en-US"/>
           </a:p>
@@ -2194,7 +2200,7 @@
           <a:p>
             <a:fld id="{B0136D52-5100-4D3E-A318-69490C5EABBE}" type="datetimeFigureOut">
               <a:rPr lang="zh-CN" altLang="en-US" smtClean="0"/>
-              <a:t>2022-02-25</a:t>
+              <a:t>2022-03-01</a:t>
             </a:fld>
             <a:endParaRPr lang="zh-CN" altLang="en-US"/>
           </a:p>
@@ -2464,7 +2470,7 @@
           <a:p>
             <a:fld id="{B0136D52-5100-4D3E-A318-69490C5EABBE}" type="datetimeFigureOut">
               <a:rPr lang="zh-CN" altLang="en-US" smtClean="0"/>
-              <a:t>2022-02-25</a:t>
+              <a:t>2022-03-01</a:t>
             </a:fld>
             <a:endParaRPr lang="zh-CN" altLang="en-US"/>
           </a:p>
@@ -2711,7 +2717,7 @@
           <a:p>
             <a:fld id="{B0136D52-5100-4D3E-A318-69490C5EABBE}" type="datetimeFigureOut">
               <a:rPr lang="zh-CN" altLang="en-US" smtClean="0"/>
-              <a:t>2022-02-25</a:t>
+              <a:t>2022-03-01</a:t>
             </a:fld>
             <a:endParaRPr lang="zh-CN" altLang="en-US"/>
           </a:p>
@@ -2917,7 +2923,7 @@
           <a:p>
             <a:fld id="{B0136D52-5100-4D3E-A318-69490C5EABBE}" type="datetimeFigureOut">
               <a:rPr lang="zh-CN" altLang="en-US" smtClean="0"/>
-              <a:t>2022-02-25</a:t>
+              <a:t>2022-03-01</a:t>
             </a:fld>
             <a:endParaRPr lang="zh-CN" altLang="en-US"/>
           </a:p>
@@ -18489,6 +18495,1722 @@
         <p14:creationId xmlns:p14="http://schemas.microsoft.com/office/powerpoint/2010/main" val="4019185613"/>
       </p:ext>
     </p:extLst>
+  </p:cSld>
+  <p:clrMapOvr>
+    <a:masterClrMapping/>
+  </p:clrMapOvr>
+</p:sld>
+</file>
+
+<file path=ppt/slides/slide61.xml><?xml version="1.0" encoding="utf-8"?>
+<p:sld xmlns:a="http://schemas.openxmlformats.org/drawingml/2006/main" xmlns:r="http://schemas.openxmlformats.org/officeDocument/2006/relationships" xmlns:p="http://schemas.openxmlformats.org/presentationml/2006/main">
+  <p:cSld>
+    <p:bg>
+      <p:bgPr>
+        <a:solidFill>
+          <a:srgbClr val="E9E9E9"/>
+        </a:solidFill>
+        <a:effectLst/>
+      </p:bgPr>
+    </p:bg>
+    <p:spTree>
+      <p:nvGrpSpPr>
+        <p:cNvPr id="1" name=""/>
+        <p:cNvGrpSpPr/>
+        <p:nvPr/>
+      </p:nvGrpSpPr>
+      <p:grpSpPr>
+        <a:xfrm>
+          <a:off x="0" y="0"/>
+          <a:ext cx="0" cy="0"/>
+          <a:chOff x="0" y="0"/>
+          <a:chExt cx="0" cy="0"/>
+        </a:xfrm>
+      </p:grpSpPr>
+      <p:sp>
+        <p:nvSpPr>
+          <p:cNvPr id="2" name="标题 1">
+            <a:extLst>
+              <a:ext uri="{FF2B5EF4-FFF2-40B4-BE49-F238E27FC236}">
+                <a16:creationId xmlns:a16="http://schemas.microsoft.com/office/drawing/2014/main" id="{0F617226-9F5C-45E4-B262-CCBFE1B69021}"/>
+              </a:ext>
+            </a:extLst>
+          </p:cNvPr>
+          <p:cNvSpPr>
+            <a:spLocks noGrp="1"/>
+          </p:cNvSpPr>
+          <p:nvPr>
+            <p:ph type="title"/>
+          </p:nvPr>
+        </p:nvSpPr>
+        <p:spPr/>
+        <p:txBody>
+          <a:bodyPr/>
+          <a:lstStyle/>
+          <a:p>
+            <a:r>
+              <a:rPr lang="zh-CN" altLang="en-US" dirty="0">
+                <a:latin typeface="华文楷体" panose="02010600040101010101" pitchFamily="2" charset="-122"/>
+                <a:ea typeface="华文楷体" panose="02010600040101010101" pitchFamily="2" charset="-122"/>
+              </a:rPr>
+              <a:t>智能估值概述</a:t>
+            </a:r>
+            <a:r>
+              <a:rPr lang="en-US" altLang="zh-CN" dirty="0">
+                <a:latin typeface="华文楷体" panose="02010600040101010101" pitchFamily="2" charset="-122"/>
+                <a:ea typeface="华文楷体" panose="02010600040101010101" pitchFamily="2" charset="-122"/>
+              </a:rPr>
+              <a:t>-</a:t>
+            </a:r>
+            <a:r>
+              <a:rPr lang="zh-CN" altLang="en-US" dirty="0">
+                <a:latin typeface="华文楷体" panose="02010600040101010101" pitchFamily="2" charset="-122"/>
+                <a:ea typeface="华文楷体" panose="02010600040101010101" pitchFamily="2" charset="-122"/>
+              </a:rPr>
+              <a:t>分析计算部分</a:t>
+            </a:r>
+          </a:p>
+        </p:txBody>
+      </p:sp>
+      <p:sp>
+        <p:nvSpPr>
+          <p:cNvPr id="3" name="内容占位符 2"/>
+          <p:cNvSpPr>
+            <a:spLocks noGrp="1"/>
+          </p:cNvSpPr>
+          <p:nvPr>
+            <p:ph idx="1"/>
+          </p:nvPr>
+        </p:nvSpPr>
+        <p:spPr>
+          <a:xfrm>
+            <a:off x="838200" y="1825625"/>
+            <a:ext cx="10515600" cy="4667250"/>
+          </a:xfrm>
+        </p:spPr>
+        <p:txBody>
+          <a:bodyPr anchor="t">
+            <a:noAutofit/>
+          </a:bodyPr>
+          <a:lstStyle/>
+          <a:p>
+            <a:pPr marL="0" indent="0">
+              <a:lnSpc>
+                <a:spcPct val="100000"/>
+              </a:lnSpc>
+              <a:spcBef>
+                <a:spcPts val="600"/>
+              </a:spcBef>
+              <a:spcAft>
+                <a:spcPts val="600"/>
+              </a:spcAft>
+              <a:buNone/>
+            </a:pPr>
+            <a:r>
+              <a:rPr lang="zh-CN" altLang="en-US" sz="2400" dirty="0">
+                <a:latin typeface="华文楷体" panose="02010600040101010101" pitchFamily="2" charset="-122"/>
+                <a:ea typeface="华文楷体" panose="02010600040101010101" pitchFamily="2" charset="-122"/>
+              </a:rPr>
+              <a:t>确定智能估值思路</a:t>
+            </a:r>
+            <a:r>
+              <a:rPr lang="en-US" altLang="zh-CN" sz="2400" dirty="0">
+                <a:latin typeface="华文楷体" panose="02010600040101010101" pitchFamily="2" charset="-122"/>
+                <a:ea typeface="华文楷体" panose="02010600040101010101" pitchFamily="2" charset="-122"/>
+              </a:rPr>
+              <a:t>-</a:t>
+            </a:r>
+            <a:r>
+              <a:rPr lang="zh-CN" altLang="en-US" sz="2400" dirty="0">
+                <a:latin typeface="华文楷体" panose="02010600040101010101" pitchFamily="2" charset="-122"/>
+                <a:ea typeface="华文楷体" panose="02010600040101010101" pitchFamily="2" charset="-122"/>
+              </a:rPr>
+              <a:t>市场法</a:t>
+            </a:r>
+            <a:endParaRPr lang="en-US" altLang="zh-CN" sz="2400" dirty="0">
+              <a:latin typeface="华文楷体" panose="02010600040101010101" pitchFamily="2" charset="-122"/>
+              <a:ea typeface="华文楷体" panose="02010600040101010101" pitchFamily="2" charset="-122"/>
+            </a:endParaRPr>
+          </a:p>
+          <a:p>
+            <a:pPr marL="0" indent="0">
+              <a:lnSpc>
+                <a:spcPct val="100000"/>
+              </a:lnSpc>
+              <a:spcBef>
+                <a:spcPts val="600"/>
+              </a:spcBef>
+              <a:spcAft>
+                <a:spcPts val="600"/>
+              </a:spcAft>
+              <a:buNone/>
+            </a:pPr>
+            <a:r>
+              <a:rPr lang="zh-CN" altLang="en-US" sz="2400" dirty="0">
+                <a:latin typeface="华文楷体" panose="02010600040101010101" pitchFamily="2" charset="-122"/>
+                <a:ea typeface="华文楷体" panose="02010600040101010101" pitchFamily="2" charset="-122"/>
+              </a:rPr>
+              <a:t>分析并梳理建立拟使用的市场法估值模型</a:t>
+            </a:r>
+            <a:endParaRPr lang="en-US" altLang="zh-CN" sz="2400" dirty="0">
+              <a:latin typeface="华文楷体" panose="02010600040101010101" pitchFamily="2" charset="-122"/>
+              <a:ea typeface="华文楷体" panose="02010600040101010101" pitchFamily="2" charset="-122"/>
+            </a:endParaRPr>
+          </a:p>
+          <a:p>
+            <a:pPr marL="0" indent="0">
+              <a:lnSpc>
+                <a:spcPct val="100000"/>
+              </a:lnSpc>
+              <a:spcBef>
+                <a:spcPts val="600"/>
+              </a:spcBef>
+              <a:spcAft>
+                <a:spcPts val="600"/>
+              </a:spcAft>
+              <a:buNone/>
+            </a:pPr>
+            <a:r>
+              <a:rPr lang="zh-CN" altLang="en-US" sz="2400" dirty="0">
+                <a:latin typeface="华文楷体" panose="02010600040101010101" pitchFamily="2" charset="-122"/>
+                <a:ea typeface="华文楷体" panose="02010600040101010101" pitchFamily="2" charset="-122"/>
+              </a:rPr>
+              <a:t>以下只提供思路，同学们可以结合自己理解使用不同的指标、权重及修正内容</a:t>
+            </a:r>
+            <a:endParaRPr lang="en-US" altLang="zh-CN" sz="2400" dirty="0">
+              <a:latin typeface="华文楷体" panose="02010600040101010101" pitchFamily="2" charset="-122"/>
+              <a:ea typeface="华文楷体" panose="02010600040101010101" pitchFamily="2" charset="-122"/>
+            </a:endParaRPr>
+          </a:p>
+          <a:p>
+            <a:pPr marL="0" indent="0">
+              <a:lnSpc>
+                <a:spcPct val="100000"/>
+              </a:lnSpc>
+              <a:spcBef>
+                <a:spcPts val="600"/>
+              </a:spcBef>
+              <a:spcAft>
+                <a:spcPts val="600"/>
+              </a:spcAft>
+              <a:buNone/>
+            </a:pPr>
+            <a:r>
+              <a:rPr lang="zh-CN" altLang="en-US" sz="2400" dirty="0">
+                <a:latin typeface="华文楷体" panose="02010600040101010101" pitchFamily="2" charset="-122"/>
+                <a:ea typeface="华文楷体" panose="02010600040101010101" pitchFamily="2" charset="-122"/>
+              </a:rPr>
+              <a:t>个人模型：</a:t>
+            </a:r>
+            <a:endParaRPr lang="en-US" altLang="zh-CN" sz="2400" dirty="0">
+              <a:latin typeface="华文楷体" panose="02010600040101010101" pitchFamily="2" charset="-122"/>
+              <a:ea typeface="华文楷体" panose="02010600040101010101" pitchFamily="2" charset="-122"/>
+            </a:endParaRPr>
+          </a:p>
+          <a:p>
+            <a:pPr marL="0" indent="0">
+              <a:lnSpc>
+                <a:spcPct val="100000"/>
+              </a:lnSpc>
+              <a:spcBef>
+                <a:spcPts val="600"/>
+              </a:spcBef>
+              <a:spcAft>
+                <a:spcPts val="600"/>
+              </a:spcAft>
+              <a:buNone/>
+            </a:pPr>
+            <a:r>
+              <a:rPr lang="en-US" altLang="zh-CN" sz="2400" dirty="0">
+                <a:latin typeface="华文楷体" panose="02010600040101010101" pitchFamily="2" charset="-122"/>
+                <a:ea typeface="华文楷体" panose="02010600040101010101" pitchFamily="2" charset="-122"/>
+              </a:rPr>
+              <a:t>1</a:t>
+            </a:r>
+            <a:r>
+              <a:rPr lang="zh-CN" altLang="en-US" sz="2400" dirty="0">
+                <a:latin typeface="华文楷体" panose="02010600040101010101" pitchFamily="2" charset="-122"/>
+                <a:ea typeface="华文楷体" panose="02010600040101010101" pitchFamily="2" charset="-122"/>
+              </a:rPr>
+              <a:t>、确定指标，个人用收入类乘数和资产类乘数综合判断市场法价值</a:t>
+            </a:r>
+            <a:r>
+              <a:rPr lang="en-US" altLang="zh-CN" sz="2400" dirty="0">
+                <a:latin typeface="华文楷体" panose="02010600040101010101" pitchFamily="2" charset="-122"/>
+                <a:ea typeface="华文楷体" panose="02010600040101010101" pitchFamily="2" charset="-122"/>
+              </a:rPr>
+              <a:t>.</a:t>
+            </a:r>
+            <a:r>
+              <a:rPr lang="zh-CN" altLang="en-US" sz="2400" dirty="0">
+                <a:latin typeface="华文楷体" panose="02010600040101010101" pitchFamily="2" charset="-122"/>
+                <a:ea typeface="华文楷体" panose="02010600040101010101" pitchFamily="2" charset="-122"/>
+              </a:rPr>
+              <a:t>收入类乘数为市盈率、市销率、</a:t>
+            </a:r>
+            <a:r>
+              <a:rPr lang="en-US" altLang="zh-CN" sz="2400" dirty="0">
+                <a:latin typeface="华文楷体" panose="02010600040101010101" pitchFamily="2" charset="-122"/>
+                <a:ea typeface="华文楷体" panose="02010600040101010101" pitchFamily="2" charset="-122"/>
+              </a:rPr>
+              <a:t>peg</a:t>
+            </a:r>
+            <a:r>
+              <a:rPr lang="zh-CN" altLang="en-US" sz="2400" dirty="0">
+                <a:latin typeface="华文楷体" panose="02010600040101010101" pitchFamily="2" charset="-122"/>
+                <a:ea typeface="华文楷体" panose="02010600040101010101" pitchFamily="2" charset="-122"/>
+              </a:rPr>
+              <a:t>的综合。资产类乘数用市净率</a:t>
+            </a:r>
+            <a:r>
+              <a:rPr lang="en-US" altLang="zh-CN" sz="2400" dirty="0">
+                <a:latin typeface="华文楷体" panose="02010600040101010101" pitchFamily="2" charset="-122"/>
+                <a:ea typeface="华文楷体" panose="02010600040101010101" pitchFamily="2" charset="-122"/>
+              </a:rPr>
+              <a:t>.</a:t>
+            </a:r>
+          </a:p>
+          <a:p>
+            <a:pPr marL="0" indent="0">
+              <a:lnSpc>
+                <a:spcPct val="100000"/>
+              </a:lnSpc>
+              <a:spcBef>
+                <a:spcPts val="600"/>
+              </a:spcBef>
+              <a:spcAft>
+                <a:spcPts val="600"/>
+              </a:spcAft>
+              <a:buNone/>
+            </a:pPr>
+            <a:r>
+              <a:rPr lang="zh-CN" altLang="en-US" sz="2400" dirty="0">
+                <a:latin typeface="华文楷体" panose="02010600040101010101" pitchFamily="2" charset="-122"/>
+                <a:ea typeface="华文楷体" panose="02010600040101010101" pitchFamily="2" charset="-122"/>
+              </a:rPr>
+              <a:t>如何智能？</a:t>
+            </a:r>
+            <a:endParaRPr lang="en-US" altLang="zh-CN" sz="2400" dirty="0">
+              <a:latin typeface="华文楷体" panose="02010600040101010101" pitchFamily="2" charset="-122"/>
+              <a:ea typeface="华文楷体" panose="02010600040101010101" pitchFamily="2" charset="-122"/>
+            </a:endParaRPr>
+          </a:p>
+          <a:p>
+            <a:pPr marL="0" indent="0">
+              <a:lnSpc>
+                <a:spcPct val="100000"/>
+              </a:lnSpc>
+              <a:spcBef>
+                <a:spcPts val="600"/>
+              </a:spcBef>
+              <a:spcAft>
+                <a:spcPts val="600"/>
+              </a:spcAft>
+              <a:buNone/>
+            </a:pPr>
+            <a:endParaRPr lang="en-US" altLang="zh-CN" sz="2400" dirty="0">
+              <a:latin typeface="华文楷体" panose="02010600040101010101" pitchFamily="2" charset="-122"/>
+              <a:ea typeface="华文楷体" panose="02010600040101010101" pitchFamily="2" charset="-122"/>
+            </a:endParaRPr>
+          </a:p>
+        </p:txBody>
+      </p:sp>
+    </p:spTree>
+    <p:extLst>
+      <p:ext uri="{BB962C8B-B14F-4D97-AF65-F5344CB8AC3E}">
+        <p14:creationId xmlns:p14="http://schemas.microsoft.com/office/powerpoint/2010/main" val="637184045"/>
+      </p:ext>
+    </p:extLst>
+  </p:cSld>
+  <p:clrMapOvr>
+    <a:masterClrMapping/>
+  </p:clrMapOvr>
+</p:sld>
+</file>
+
+<file path=ppt/slides/slide62.xml><?xml version="1.0" encoding="utf-8"?>
+<p:sld xmlns:a="http://schemas.openxmlformats.org/drawingml/2006/main" xmlns:r="http://schemas.openxmlformats.org/officeDocument/2006/relationships" xmlns:p="http://schemas.openxmlformats.org/presentationml/2006/main">
+  <p:cSld>
+    <p:bg>
+      <p:bgPr>
+        <a:solidFill>
+          <a:srgbClr val="E9E9E9"/>
+        </a:solidFill>
+        <a:effectLst/>
+      </p:bgPr>
+    </p:bg>
+    <p:spTree>
+      <p:nvGrpSpPr>
+        <p:cNvPr id="1" name=""/>
+        <p:cNvGrpSpPr/>
+        <p:nvPr/>
+      </p:nvGrpSpPr>
+      <p:grpSpPr>
+        <a:xfrm>
+          <a:off x="0" y="0"/>
+          <a:ext cx="0" cy="0"/>
+          <a:chOff x="0" y="0"/>
+          <a:chExt cx="0" cy="0"/>
+        </a:xfrm>
+      </p:grpSpPr>
+      <p:sp>
+        <p:nvSpPr>
+          <p:cNvPr id="2" name="标题 1">
+            <a:extLst>
+              <a:ext uri="{FF2B5EF4-FFF2-40B4-BE49-F238E27FC236}">
+                <a16:creationId xmlns:a16="http://schemas.microsoft.com/office/drawing/2014/main" id="{0F617226-9F5C-45E4-B262-CCBFE1B69021}"/>
+              </a:ext>
+            </a:extLst>
+          </p:cNvPr>
+          <p:cNvSpPr>
+            <a:spLocks noGrp="1"/>
+          </p:cNvSpPr>
+          <p:nvPr>
+            <p:ph type="title"/>
+          </p:nvPr>
+        </p:nvSpPr>
+        <p:spPr/>
+        <p:txBody>
+          <a:bodyPr/>
+          <a:lstStyle/>
+          <a:p>
+            <a:r>
+              <a:rPr lang="zh-CN" altLang="en-US" dirty="0">
+                <a:latin typeface="华文楷体" panose="02010600040101010101" pitchFamily="2" charset="-122"/>
+                <a:ea typeface="华文楷体" panose="02010600040101010101" pitchFamily="2" charset="-122"/>
+              </a:rPr>
+              <a:t>智能估值概述</a:t>
+            </a:r>
+            <a:r>
+              <a:rPr lang="en-US" altLang="zh-CN" dirty="0">
+                <a:latin typeface="华文楷体" panose="02010600040101010101" pitchFamily="2" charset="-122"/>
+                <a:ea typeface="华文楷体" panose="02010600040101010101" pitchFamily="2" charset="-122"/>
+              </a:rPr>
+              <a:t>-</a:t>
+            </a:r>
+            <a:r>
+              <a:rPr lang="zh-CN" altLang="en-US" dirty="0">
+                <a:latin typeface="华文楷体" panose="02010600040101010101" pitchFamily="2" charset="-122"/>
+                <a:ea typeface="华文楷体" panose="02010600040101010101" pitchFamily="2" charset="-122"/>
+              </a:rPr>
+              <a:t>分析计算部分</a:t>
+            </a:r>
+          </a:p>
+        </p:txBody>
+      </p:sp>
+      <p:sp>
+        <p:nvSpPr>
+          <p:cNvPr id="3" name="内容占位符 2"/>
+          <p:cNvSpPr>
+            <a:spLocks noGrp="1"/>
+          </p:cNvSpPr>
+          <p:nvPr>
+            <p:ph idx="1"/>
+          </p:nvPr>
+        </p:nvSpPr>
+        <p:spPr>
+          <a:xfrm>
+            <a:off x="838200" y="1825625"/>
+            <a:ext cx="10515600" cy="4667250"/>
+          </a:xfrm>
+        </p:spPr>
+        <p:txBody>
+          <a:bodyPr anchor="t">
+            <a:noAutofit/>
+          </a:bodyPr>
+          <a:lstStyle/>
+          <a:p>
+            <a:pPr marL="0" indent="0">
+              <a:lnSpc>
+                <a:spcPct val="100000"/>
+              </a:lnSpc>
+              <a:spcBef>
+                <a:spcPts val="600"/>
+              </a:spcBef>
+              <a:spcAft>
+                <a:spcPts val="600"/>
+              </a:spcAft>
+              <a:buNone/>
+            </a:pPr>
+            <a:r>
+              <a:rPr lang="zh-CN" altLang="en-US" sz="2400" dirty="0">
+                <a:latin typeface="华文楷体" panose="02010600040101010101" pitchFamily="2" charset="-122"/>
+                <a:ea typeface="华文楷体" panose="02010600040101010101" pitchFamily="2" charset="-122"/>
+              </a:rPr>
+              <a:t>确定智能估值思路</a:t>
+            </a:r>
+            <a:r>
+              <a:rPr lang="en-US" altLang="zh-CN" sz="2400" dirty="0">
+                <a:latin typeface="华文楷体" panose="02010600040101010101" pitchFamily="2" charset="-122"/>
+                <a:ea typeface="华文楷体" panose="02010600040101010101" pitchFamily="2" charset="-122"/>
+              </a:rPr>
+              <a:t>-</a:t>
+            </a:r>
+            <a:r>
+              <a:rPr lang="zh-CN" altLang="en-US" sz="2400" dirty="0">
+                <a:latin typeface="华文楷体" panose="02010600040101010101" pitchFamily="2" charset="-122"/>
+                <a:ea typeface="华文楷体" panose="02010600040101010101" pitchFamily="2" charset="-122"/>
+              </a:rPr>
+              <a:t>市场法</a:t>
+            </a:r>
+            <a:endParaRPr lang="en-US" altLang="zh-CN" sz="2400" dirty="0">
+              <a:latin typeface="华文楷体" panose="02010600040101010101" pitchFamily="2" charset="-122"/>
+              <a:ea typeface="华文楷体" panose="02010600040101010101" pitchFamily="2" charset="-122"/>
+            </a:endParaRPr>
+          </a:p>
+          <a:p>
+            <a:pPr marL="0" indent="0">
+              <a:lnSpc>
+                <a:spcPct val="100000"/>
+              </a:lnSpc>
+              <a:spcBef>
+                <a:spcPts val="600"/>
+              </a:spcBef>
+              <a:spcAft>
+                <a:spcPts val="600"/>
+              </a:spcAft>
+              <a:buNone/>
+            </a:pPr>
+            <a:r>
+              <a:rPr lang="en-US" altLang="zh-CN" sz="2400" dirty="0">
+                <a:latin typeface="华文楷体" panose="02010600040101010101" pitchFamily="2" charset="-122"/>
+                <a:ea typeface="华文楷体" panose="02010600040101010101" pitchFamily="2" charset="-122"/>
+              </a:rPr>
+              <a:t>2</a:t>
+            </a:r>
+            <a:r>
+              <a:rPr lang="zh-CN" altLang="en-US" sz="2400" dirty="0">
+                <a:latin typeface="华文楷体" panose="02010600040101010101" pitchFamily="2" charset="-122"/>
+                <a:ea typeface="华文楷体" panose="02010600040101010101" pitchFamily="2" charset="-122"/>
+              </a:rPr>
+              <a:t>、区分行业和阶段使用不同的指标权重</a:t>
+            </a:r>
+            <a:endParaRPr lang="en-US" altLang="zh-CN" sz="2400" dirty="0">
+              <a:latin typeface="华文楷体" panose="02010600040101010101" pitchFamily="2" charset="-122"/>
+              <a:ea typeface="华文楷体" panose="02010600040101010101" pitchFamily="2" charset="-122"/>
+            </a:endParaRPr>
+          </a:p>
+          <a:p>
+            <a:pPr marL="0" indent="0">
+              <a:lnSpc>
+                <a:spcPct val="100000"/>
+              </a:lnSpc>
+              <a:spcBef>
+                <a:spcPts val="600"/>
+              </a:spcBef>
+              <a:spcAft>
+                <a:spcPts val="600"/>
+              </a:spcAft>
+              <a:buNone/>
+            </a:pPr>
+            <a:r>
+              <a:rPr lang="zh-CN" altLang="en-US" sz="2400" dirty="0">
+                <a:latin typeface="华文楷体" panose="02010600040101010101" pitchFamily="2" charset="-122"/>
+                <a:ea typeface="华文楷体" panose="02010600040101010101" pitchFamily="2" charset="-122"/>
+              </a:rPr>
+              <a:t>我的分类：科创板、传统行业、非传统行业</a:t>
+            </a:r>
+            <a:endParaRPr lang="en-US" altLang="zh-CN" sz="2400" dirty="0">
+              <a:latin typeface="华文楷体" panose="02010600040101010101" pitchFamily="2" charset="-122"/>
+              <a:ea typeface="华文楷体" panose="02010600040101010101" pitchFamily="2" charset="-122"/>
+            </a:endParaRPr>
+          </a:p>
+          <a:p>
+            <a:pPr marL="0" indent="0">
+              <a:lnSpc>
+                <a:spcPct val="100000"/>
+              </a:lnSpc>
+              <a:spcBef>
+                <a:spcPts val="600"/>
+              </a:spcBef>
+              <a:spcAft>
+                <a:spcPts val="600"/>
+              </a:spcAft>
+              <a:buNone/>
+            </a:pPr>
+            <a:r>
+              <a:rPr lang="en-US" altLang="zh-CN" sz="2400" dirty="0">
+                <a:latin typeface="华文楷体" panose="02010600040101010101" pitchFamily="2" charset="-122"/>
+                <a:ea typeface="华文楷体" panose="02010600040101010101" pitchFamily="2" charset="-122"/>
+              </a:rPr>
+              <a:t>3</a:t>
+            </a:r>
+            <a:r>
+              <a:rPr lang="zh-CN" altLang="en-US" sz="2400" dirty="0">
+                <a:latin typeface="华文楷体" panose="02010600040101010101" pitchFamily="2" charset="-122"/>
+                <a:ea typeface="华文楷体" panose="02010600040101010101" pitchFamily="2" charset="-122"/>
+              </a:rPr>
+              <a:t>、根据不同的指标权重确定估值</a:t>
+            </a:r>
+            <a:endParaRPr lang="en-US" altLang="zh-CN" sz="2400" dirty="0">
+              <a:latin typeface="华文楷体" panose="02010600040101010101" pitchFamily="2" charset="-122"/>
+              <a:ea typeface="华文楷体" panose="02010600040101010101" pitchFamily="2" charset="-122"/>
+            </a:endParaRPr>
+          </a:p>
+          <a:p>
+            <a:pPr marL="0" indent="0">
+              <a:lnSpc>
+                <a:spcPct val="100000"/>
+              </a:lnSpc>
+              <a:spcBef>
+                <a:spcPts val="600"/>
+              </a:spcBef>
+              <a:spcAft>
+                <a:spcPts val="600"/>
+              </a:spcAft>
+              <a:buNone/>
+            </a:pPr>
+            <a:r>
+              <a:rPr lang="en-US" altLang="zh-CN" sz="2400" dirty="0">
+                <a:latin typeface="华文楷体" panose="02010600040101010101" pitchFamily="2" charset="-122"/>
+                <a:ea typeface="华文楷体" panose="02010600040101010101" pitchFamily="2" charset="-122"/>
+              </a:rPr>
+              <a:t>4</a:t>
+            </a:r>
+            <a:r>
+              <a:rPr lang="zh-CN" altLang="en-US" sz="2400" dirty="0">
+                <a:latin typeface="华文楷体" panose="02010600040101010101" pitchFamily="2" charset="-122"/>
+                <a:ea typeface="华文楷体" panose="02010600040101010101" pitchFamily="2" charset="-122"/>
+              </a:rPr>
+              <a:t>、引入财务打分等修正因素对估值进行调整</a:t>
+            </a:r>
+            <a:endParaRPr lang="en-US" altLang="zh-CN" sz="2400" dirty="0">
+              <a:latin typeface="华文楷体" panose="02010600040101010101" pitchFamily="2" charset="-122"/>
+              <a:ea typeface="华文楷体" panose="02010600040101010101" pitchFamily="2" charset="-122"/>
+            </a:endParaRPr>
+          </a:p>
+          <a:p>
+            <a:pPr marL="0" indent="0">
+              <a:lnSpc>
+                <a:spcPct val="100000"/>
+              </a:lnSpc>
+              <a:spcBef>
+                <a:spcPts val="600"/>
+              </a:spcBef>
+              <a:spcAft>
+                <a:spcPts val="600"/>
+              </a:spcAft>
+              <a:buNone/>
+            </a:pPr>
+            <a:r>
+              <a:rPr lang="en-US" altLang="zh-CN" sz="2400" dirty="0">
+                <a:latin typeface="华文楷体" panose="02010600040101010101" pitchFamily="2" charset="-122"/>
+                <a:ea typeface="华文楷体" panose="02010600040101010101" pitchFamily="2" charset="-122"/>
+              </a:rPr>
+              <a:t>5</a:t>
+            </a:r>
+            <a:r>
+              <a:rPr lang="zh-CN" altLang="en-US" sz="2400" dirty="0">
+                <a:latin typeface="华文楷体" panose="02010600040101010101" pitchFamily="2" charset="-122"/>
+                <a:ea typeface="华文楷体" panose="02010600040101010101" pitchFamily="2" charset="-122"/>
+              </a:rPr>
+              <a:t>、大规模修正并处理异常情况</a:t>
+            </a:r>
+            <a:endParaRPr lang="en-US" altLang="zh-CN" sz="2400" dirty="0">
+              <a:latin typeface="华文楷体" panose="02010600040101010101" pitchFamily="2" charset="-122"/>
+              <a:ea typeface="华文楷体" panose="02010600040101010101" pitchFamily="2" charset="-122"/>
+            </a:endParaRPr>
+          </a:p>
+          <a:p>
+            <a:pPr marL="0" indent="0">
+              <a:lnSpc>
+                <a:spcPct val="100000"/>
+              </a:lnSpc>
+              <a:spcBef>
+                <a:spcPts val="600"/>
+              </a:spcBef>
+              <a:spcAft>
+                <a:spcPts val="600"/>
+              </a:spcAft>
+              <a:buNone/>
+            </a:pPr>
+            <a:endParaRPr lang="en-US" altLang="zh-CN" sz="2400" dirty="0">
+              <a:latin typeface="华文楷体" panose="02010600040101010101" pitchFamily="2" charset="-122"/>
+              <a:ea typeface="华文楷体" panose="02010600040101010101" pitchFamily="2" charset="-122"/>
+            </a:endParaRPr>
+          </a:p>
+          <a:p>
+            <a:pPr marL="0" indent="0">
+              <a:lnSpc>
+                <a:spcPct val="100000"/>
+              </a:lnSpc>
+              <a:spcBef>
+                <a:spcPts val="600"/>
+              </a:spcBef>
+              <a:spcAft>
+                <a:spcPts val="600"/>
+              </a:spcAft>
+              <a:buNone/>
+            </a:pPr>
+            <a:r>
+              <a:rPr lang="zh-CN" altLang="en-US" sz="2400" dirty="0">
+                <a:latin typeface="华文楷体" panose="02010600040101010101" pitchFamily="2" charset="-122"/>
+                <a:ea typeface="华文楷体" panose="02010600040101010101" pitchFamily="2" charset="-122"/>
+              </a:rPr>
+              <a:t>示例</a:t>
+            </a:r>
+            <a:r>
+              <a:rPr lang="en-US" altLang="zh-CN" sz="2400" dirty="0">
+                <a:latin typeface="华文楷体" panose="02010600040101010101" pitchFamily="2" charset="-122"/>
+                <a:ea typeface="华文楷体" panose="02010600040101010101" pitchFamily="2" charset="-122"/>
+              </a:rPr>
+              <a:t>7</a:t>
+            </a:r>
+            <a:r>
+              <a:rPr lang="zh-CN" altLang="en-US" sz="2400" dirty="0">
+                <a:latin typeface="华文楷体" panose="02010600040101010101" pitchFamily="2" charset="-122"/>
+                <a:ea typeface="华文楷体" panose="02010600040101010101" pitchFamily="2" charset="-122"/>
+              </a:rPr>
+              <a:t>简化版市场法估值程序</a:t>
+            </a:r>
+            <a:endParaRPr lang="en-US" altLang="zh-CN" sz="2400" dirty="0">
+              <a:latin typeface="华文楷体" panose="02010600040101010101" pitchFamily="2" charset="-122"/>
+              <a:ea typeface="华文楷体" panose="02010600040101010101" pitchFamily="2" charset="-122"/>
+            </a:endParaRPr>
+          </a:p>
+          <a:p>
+            <a:pPr marL="0" indent="0">
+              <a:lnSpc>
+                <a:spcPct val="100000"/>
+              </a:lnSpc>
+              <a:spcBef>
+                <a:spcPts val="600"/>
+              </a:spcBef>
+              <a:spcAft>
+                <a:spcPts val="600"/>
+              </a:spcAft>
+              <a:buNone/>
+            </a:pPr>
+            <a:endParaRPr lang="en-US" altLang="zh-CN" sz="2400" dirty="0">
+              <a:latin typeface="华文楷体" panose="02010600040101010101" pitchFamily="2" charset="-122"/>
+              <a:ea typeface="华文楷体" panose="02010600040101010101" pitchFamily="2" charset="-122"/>
+            </a:endParaRPr>
+          </a:p>
+        </p:txBody>
+      </p:sp>
+    </p:spTree>
+    <p:extLst>
+      <p:ext uri="{BB962C8B-B14F-4D97-AF65-F5344CB8AC3E}">
+        <p14:creationId xmlns:p14="http://schemas.microsoft.com/office/powerpoint/2010/main" val="275840152"/>
+      </p:ext>
+    </p:extLst>
+  </p:cSld>
+  <p:clrMapOvr>
+    <a:masterClrMapping/>
+  </p:clrMapOvr>
+</p:sld>
+</file>
+
+<file path=ppt/slides/slide63.xml><?xml version="1.0" encoding="utf-8"?>
+<p:sld xmlns:a="http://schemas.openxmlformats.org/drawingml/2006/main" xmlns:r="http://schemas.openxmlformats.org/officeDocument/2006/relationships" xmlns:p="http://schemas.openxmlformats.org/presentationml/2006/main">
+  <p:cSld>
+    <p:bg>
+      <p:bgPr>
+        <a:solidFill>
+          <a:srgbClr val="E9E9E9"/>
+        </a:solidFill>
+        <a:effectLst/>
+      </p:bgPr>
+    </p:bg>
+    <p:spTree>
+      <p:nvGrpSpPr>
+        <p:cNvPr id="1" name=""/>
+        <p:cNvGrpSpPr/>
+        <p:nvPr/>
+      </p:nvGrpSpPr>
+      <p:grpSpPr>
+        <a:xfrm>
+          <a:off x="0" y="0"/>
+          <a:ext cx="0" cy="0"/>
+          <a:chOff x="0" y="0"/>
+          <a:chExt cx="0" cy="0"/>
+        </a:xfrm>
+      </p:grpSpPr>
+      <p:sp>
+        <p:nvSpPr>
+          <p:cNvPr id="2" name="标题 1">
+            <a:extLst>
+              <a:ext uri="{FF2B5EF4-FFF2-40B4-BE49-F238E27FC236}">
+                <a16:creationId xmlns:a16="http://schemas.microsoft.com/office/drawing/2014/main" id="{0F617226-9F5C-45E4-B262-CCBFE1B69021}"/>
+              </a:ext>
+            </a:extLst>
+          </p:cNvPr>
+          <p:cNvSpPr>
+            <a:spLocks noGrp="1"/>
+          </p:cNvSpPr>
+          <p:nvPr>
+            <p:ph type="title"/>
+          </p:nvPr>
+        </p:nvSpPr>
+        <p:spPr/>
+        <p:txBody>
+          <a:bodyPr/>
+          <a:lstStyle/>
+          <a:p>
+            <a:r>
+              <a:rPr lang="zh-CN" altLang="en-US" dirty="0">
+                <a:latin typeface="华文楷体" panose="02010600040101010101" pitchFamily="2" charset="-122"/>
+                <a:ea typeface="华文楷体" panose="02010600040101010101" pitchFamily="2" charset="-122"/>
+              </a:rPr>
+              <a:t>智能估值概述</a:t>
+            </a:r>
+            <a:r>
+              <a:rPr lang="en-US" altLang="zh-CN" dirty="0">
+                <a:latin typeface="华文楷体" panose="02010600040101010101" pitchFamily="2" charset="-122"/>
+                <a:ea typeface="华文楷体" panose="02010600040101010101" pitchFamily="2" charset="-122"/>
+              </a:rPr>
+              <a:t>-</a:t>
+            </a:r>
+            <a:r>
+              <a:rPr lang="zh-CN" altLang="en-US" dirty="0">
+                <a:latin typeface="华文楷体" panose="02010600040101010101" pitchFamily="2" charset="-122"/>
+                <a:ea typeface="华文楷体" panose="02010600040101010101" pitchFamily="2" charset="-122"/>
+              </a:rPr>
+              <a:t>分析计算部分</a:t>
+            </a:r>
+          </a:p>
+        </p:txBody>
+      </p:sp>
+      <p:sp>
+        <p:nvSpPr>
+          <p:cNvPr id="3" name="内容占位符 2"/>
+          <p:cNvSpPr>
+            <a:spLocks noGrp="1"/>
+          </p:cNvSpPr>
+          <p:nvPr>
+            <p:ph idx="1"/>
+          </p:nvPr>
+        </p:nvSpPr>
+        <p:spPr>
+          <a:xfrm>
+            <a:off x="838200" y="1825625"/>
+            <a:ext cx="10515600" cy="4667250"/>
+          </a:xfrm>
+        </p:spPr>
+        <p:txBody>
+          <a:bodyPr anchor="t">
+            <a:noAutofit/>
+          </a:bodyPr>
+          <a:lstStyle/>
+          <a:p>
+            <a:pPr marL="0" indent="0">
+              <a:lnSpc>
+                <a:spcPct val="100000"/>
+              </a:lnSpc>
+              <a:spcBef>
+                <a:spcPts val="600"/>
+              </a:spcBef>
+              <a:spcAft>
+                <a:spcPts val="600"/>
+              </a:spcAft>
+              <a:buNone/>
+            </a:pPr>
+            <a:r>
+              <a:rPr lang="zh-CN" altLang="en-US" sz="2400" dirty="0">
+                <a:latin typeface="华文楷体" panose="02010600040101010101" pitchFamily="2" charset="-122"/>
+                <a:ea typeface="华文楷体" panose="02010600040101010101" pitchFamily="2" charset="-122"/>
+              </a:rPr>
+              <a:t>确定智能估值思路</a:t>
+            </a:r>
+            <a:r>
+              <a:rPr lang="en-US" altLang="zh-CN" sz="2400" dirty="0">
+                <a:latin typeface="华文楷体" panose="02010600040101010101" pitchFamily="2" charset="-122"/>
+                <a:ea typeface="华文楷体" panose="02010600040101010101" pitchFamily="2" charset="-122"/>
+              </a:rPr>
+              <a:t>-</a:t>
+            </a:r>
+            <a:r>
+              <a:rPr lang="zh-CN" altLang="en-US" sz="2400" dirty="0">
+                <a:latin typeface="华文楷体" panose="02010600040101010101" pitchFamily="2" charset="-122"/>
+                <a:ea typeface="华文楷体" panose="02010600040101010101" pitchFamily="2" charset="-122"/>
+              </a:rPr>
+              <a:t>收益法</a:t>
+            </a:r>
+            <a:endParaRPr lang="en-US" altLang="zh-CN" sz="2400" dirty="0">
+              <a:latin typeface="华文楷体" panose="02010600040101010101" pitchFamily="2" charset="-122"/>
+              <a:ea typeface="华文楷体" panose="02010600040101010101" pitchFamily="2" charset="-122"/>
+            </a:endParaRPr>
+          </a:p>
+          <a:p>
+            <a:pPr marL="0" indent="0">
+              <a:lnSpc>
+                <a:spcPct val="100000"/>
+              </a:lnSpc>
+              <a:spcBef>
+                <a:spcPts val="600"/>
+              </a:spcBef>
+              <a:spcAft>
+                <a:spcPts val="600"/>
+              </a:spcAft>
+              <a:buNone/>
+            </a:pPr>
+            <a:r>
+              <a:rPr lang="zh-CN" altLang="en-US" sz="2400" dirty="0">
+                <a:latin typeface="华文楷体" panose="02010600040101010101" pitchFamily="2" charset="-122"/>
+                <a:ea typeface="华文楷体" panose="02010600040101010101" pitchFamily="2" charset="-122"/>
+              </a:rPr>
+              <a:t>分析并梳理建立拟使用的收益法估值模型</a:t>
+            </a:r>
+            <a:endParaRPr lang="en-US" altLang="zh-CN" sz="2400" dirty="0">
+              <a:latin typeface="华文楷体" panose="02010600040101010101" pitchFamily="2" charset="-122"/>
+              <a:ea typeface="华文楷体" panose="02010600040101010101" pitchFamily="2" charset="-122"/>
+            </a:endParaRPr>
+          </a:p>
+          <a:p>
+            <a:pPr marL="0" indent="0">
+              <a:lnSpc>
+                <a:spcPct val="100000"/>
+              </a:lnSpc>
+              <a:spcBef>
+                <a:spcPts val="600"/>
+              </a:spcBef>
+              <a:spcAft>
+                <a:spcPts val="600"/>
+              </a:spcAft>
+              <a:buNone/>
+            </a:pPr>
+            <a:r>
+              <a:rPr lang="zh-CN" altLang="en-US" sz="2400" dirty="0">
+                <a:latin typeface="华文楷体" panose="02010600040101010101" pitchFamily="2" charset="-122"/>
+                <a:ea typeface="华文楷体" panose="02010600040101010101" pitchFamily="2" charset="-122"/>
+              </a:rPr>
+              <a:t>以下只提供思路，同学们可以结合自己理解使用不同的方法</a:t>
+            </a:r>
+            <a:endParaRPr lang="en-US" altLang="zh-CN" sz="2400" dirty="0">
+              <a:latin typeface="华文楷体" panose="02010600040101010101" pitchFamily="2" charset="-122"/>
+              <a:ea typeface="华文楷体" panose="02010600040101010101" pitchFamily="2" charset="-122"/>
+            </a:endParaRPr>
+          </a:p>
+          <a:p>
+            <a:pPr marL="0" indent="0">
+              <a:lnSpc>
+                <a:spcPct val="100000"/>
+              </a:lnSpc>
+              <a:spcBef>
+                <a:spcPts val="600"/>
+              </a:spcBef>
+              <a:spcAft>
+                <a:spcPts val="600"/>
+              </a:spcAft>
+              <a:buNone/>
+            </a:pPr>
+            <a:r>
+              <a:rPr lang="zh-CN" altLang="en-US" sz="2400" dirty="0">
+                <a:latin typeface="华文楷体" panose="02010600040101010101" pitchFamily="2" charset="-122"/>
+                <a:ea typeface="华文楷体" panose="02010600040101010101" pitchFamily="2" charset="-122"/>
+              </a:rPr>
+              <a:t>个人模型：</a:t>
+            </a:r>
+            <a:endParaRPr lang="en-US" altLang="zh-CN" sz="2400" dirty="0">
+              <a:latin typeface="华文楷体" panose="02010600040101010101" pitchFamily="2" charset="-122"/>
+              <a:ea typeface="华文楷体" panose="02010600040101010101" pitchFamily="2" charset="-122"/>
+            </a:endParaRPr>
+          </a:p>
+          <a:p>
+            <a:pPr marL="0" indent="0">
+              <a:lnSpc>
+                <a:spcPct val="100000"/>
+              </a:lnSpc>
+              <a:spcBef>
+                <a:spcPts val="600"/>
+              </a:spcBef>
+              <a:spcAft>
+                <a:spcPts val="600"/>
+              </a:spcAft>
+              <a:buNone/>
+            </a:pPr>
+            <a:r>
+              <a:rPr lang="en-US" altLang="zh-CN" sz="2400" dirty="0">
+                <a:latin typeface="华文楷体" panose="02010600040101010101" pitchFamily="2" charset="-122"/>
+                <a:ea typeface="华文楷体" panose="02010600040101010101" pitchFamily="2" charset="-122"/>
+              </a:rPr>
+              <a:t>1</a:t>
+            </a:r>
+            <a:r>
+              <a:rPr lang="zh-CN" altLang="en-US" sz="2400" dirty="0">
+                <a:latin typeface="华文楷体" panose="02010600040101010101" pitchFamily="2" charset="-122"/>
+                <a:ea typeface="华文楷体" panose="02010600040101010101" pitchFamily="2" charset="-122"/>
+              </a:rPr>
+              <a:t>、清理思路，我们需要得到什么结果，什么输出？需要使用什么数据，什么输入？</a:t>
+            </a:r>
+            <a:endParaRPr lang="en-US" altLang="zh-CN" sz="2400" dirty="0">
+              <a:latin typeface="华文楷体" panose="02010600040101010101" pitchFamily="2" charset="-122"/>
+              <a:ea typeface="华文楷体" panose="02010600040101010101" pitchFamily="2" charset="-122"/>
+            </a:endParaRPr>
+          </a:p>
+          <a:p>
+            <a:pPr marL="0" indent="0">
+              <a:lnSpc>
+                <a:spcPct val="100000"/>
+              </a:lnSpc>
+              <a:spcBef>
+                <a:spcPts val="600"/>
+              </a:spcBef>
+              <a:spcAft>
+                <a:spcPts val="600"/>
+              </a:spcAft>
+              <a:buNone/>
+            </a:pPr>
+            <a:r>
+              <a:rPr lang="en-US" altLang="zh-CN" sz="2400" dirty="0">
+                <a:latin typeface="华文楷体" panose="02010600040101010101" pitchFamily="2" charset="-122"/>
+                <a:ea typeface="华文楷体" panose="02010600040101010101" pitchFamily="2" charset="-122"/>
+              </a:rPr>
+              <a:t>2</a:t>
+            </a:r>
+            <a:r>
+              <a:rPr lang="zh-CN" altLang="en-US" sz="2400" dirty="0">
+                <a:latin typeface="华文楷体" panose="02010600040101010101" pitchFamily="2" charset="-122"/>
+                <a:ea typeface="华文楷体" panose="02010600040101010101" pitchFamily="2" charset="-122"/>
+              </a:rPr>
+              <a:t>、我们到底要在哪部分实现智能化，是实现全智能还是半智能？</a:t>
+            </a:r>
+            <a:endParaRPr lang="en-US" altLang="zh-CN" sz="2400" dirty="0">
+              <a:latin typeface="华文楷体" panose="02010600040101010101" pitchFamily="2" charset="-122"/>
+              <a:ea typeface="华文楷体" panose="02010600040101010101" pitchFamily="2" charset="-122"/>
+            </a:endParaRPr>
+          </a:p>
+          <a:p>
+            <a:pPr marL="0" indent="0">
+              <a:lnSpc>
+                <a:spcPct val="100000"/>
+              </a:lnSpc>
+              <a:spcBef>
+                <a:spcPts val="600"/>
+              </a:spcBef>
+              <a:spcAft>
+                <a:spcPts val="600"/>
+              </a:spcAft>
+              <a:buNone/>
+            </a:pPr>
+            <a:r>
+              <a:rPr lang="en-US" altLang="zh-CN" sz="2400" dirty="0">
+                <a:latin typeface="华文楷体" panose="02010600040101010101" pitchFamily="2" charset="-122"/>
+                <a:ea typeface="华文楷体" panose="02010600040101010101" pitchFamily="2" charset="-122"/>
+              </a:rPr>
+              <a:t>3</a:t>
+            </a:r>
+            <a:r>
+              <a:rPr lang="zh-CN" altLang="en-US" sz="2400" dirty="0">
+                <a:latin typeface="华文楷体" panose="02010600040101010101" pitchFamily="2" charset="-122"/>
+                <a:ea typeface="华文楷体" panose="02010600040101010101" pitchFamily="2" charset="-122"/>
+              </a:rPr>
+              <a:t>、收益法测算表全面梳理</a:t>
+            </a:r>
+            <a:endParaRPr lang="en-US" altLang="zh-CN" sz="2400" dirty="0">
+              <a:latin typeface="华文楷体" panose="02010600040101010101" pitchFamily="2" charset="-122"/>
+              <a:ea typeface="华文楷体" panose="02010600040101010101" pitchFamily="2" charset="-122"/>
+            </a:endParaRPr>
+          </a:p>
+        </p:txBody>
+      </p:sp>
+    </p:spTree>
+    <p:extLst>
+      <p:ext uri="{BB962C8B-B14F-4D97-AF65-F5344CB8AC3E}">
+        <p14:creationId xmlns:p14="http://schemas.microsoft.com/office/powerpoint/2010/main" val="2221252550"/>
+      </p:ext>
+    </p:extLst>
+  </p:cSld>
+  <p:clrMapOvr>
+    <a:masterClrMapping/>
+  </p:clrMapOvr>
+</p:sld>
+</file>
+
+<file path=ppt/slides/slide64.xml><?xml version="1.0" encoding="utf-8"?>
+<p:sld xmlns:a="http://schemas.openxmlformats.org/drawingml/2006/main" xmlns:r="http://schemas.openxmlformats.org/officeDocument/2006/relationships" xmlns:p="http://schemas.openxmlformats.org/presentationml/2006/main">
+  <p:cSld>
+    <p:bg>
+      <p:bgPr>
+        <a:solidFill>
+          <a:srgbClr val="E9E9E9"/>
+        </a:solidFill>
+        <a:effectLst/>
+      </p:bgPr>
+    </p:bg>
+    <p:spTree>
+      <p:nvGrpSpPr>
+        <p:cNvPr id="1" name=""/>
+        <p:cNvGrpSpPr/>
+        <p:nvPr/>
+      </p:nvGrpSpPr>
+      <p:grpSpPr>
+        <a:xfrm>
+          <a:off x="0" y="0"/>
+          <a:ext cx="0" cy="0"/>
+          <a:chOff x="0" y="0"/>
+          <a:chExt cx="0" cy="0"/>
+        </a:xfrm>
+      </p:grpSpPr>
+      <p:sp>
+        <p:nvSpPr>
+          <p:cNvPr id="2" name="标题 1">
+            <a:extLst>
+              <a:ext uri="{FF2B5EF4-FFF2-40B4-BE49-F238E27FC236}">
+                <a16:creationId xmlns:a16="http://schemas.microsoft.com/office/drawing/2014/main" id="{0F617226-9F5C-45E4-B262-CCBFE1B69021}"/>
+              </a:ext>
+            </a:extLst>
+          </p:cNvPr>
+          <p:cNvSpPr>
+            <a:spLocks noGrp="1"/>
+          </p:cNvSpPr>
+          <p:nvPr>
+            <p:ph type="title"/>
+          </p:nvPr>
+        </p:nvSpPr>
+        <p:spPr/>
+        <p:txBody>
+          <a:bodyPr/>
+          <a:lstStyle/>
+          <a:p>
+            <a:r>
+              <a:rPr lang="zh-CN" altLang="en-US" dirty="0">
+                <a:latin typeface="华文楷体" panose="02010600040101010101" pitchFamily="2" charset="-122"/>
+                <a:ea typeface="华文楷体" panose="02010600040101010101" pitchFamily="2" charset="-122"/>
+              </a:rPr>
+              <a:t>智能估值概述</a:t>
+            </a:r>
+            <a:r>
+              <a:rPr lang="en-US" altLang="zh-CN" dirty="0">
+                <a:latin typeface="华文楷体" panose="02010600040101010101" pitchFamily="2" charset="-122"/>
+                <a:ea typeface="华文楷体" panose="02010600040101010101" pitchFamily="2" charset="-122"/>
+              </a:rPr>
+              <a:t>-</a:t>
+            </a:r>
+            <a:r>
+              <a:rPr lang="zh-CN" altLang="en-US" dirty="0">
+                <a:latin typeface="华文楷体" panose="02010600040101010101" pitchFamily="2" charset="-122"/>
+                <a:ea typeface="华文楷体" panose="02010600040101010101" pitchFamily="2" charset="-122"/>
+              </a:rPr>
+              <a:t>分析计算部分</a:t>
+            </a:r>
+          </a:p>
+        </p:txBody>
+      </p:sp>
+      <p:sp>
+        <p:nvSpPr>
+          <p:cNvPr id="3" name="内容占位符 2"/>
+          <p:cNvSpPr>
+            <a:spLocks noGrp="1"/>
+          </p:cNvSpPr>
+          <p:nvPr>
+            <p:ph idx="1"/>
+          </p:nvPr>
+        </p:nvSpPr>
+        <p:spPr>
+          <a:xfrm>
+            <a:off x="838200" y="1825625"/>
+            <a:ext cx="10515600" cy="4667250"/>
+          </a:xfrm>
+        </p:spPr>
+        <p:txBody>
+          <a:bodyPr anchor="t">
+            <a:noAutofit/>
+          </a:bodyPr>
+          <a:lstStyle/>
+          <a:p>
+            <a:pPr marL="0" indent="0">
+              <a:lnSpc>
+                <a:spcPct val="100000"/>
+              </a:lnSpc>
+              <a:spcBef>
+                <a:spcPts val="600"/>
+              </a:spcBef>
+              <a:spcAft>
+                <a:spcPts val="600"/>
+              </a:spcAft>
+              <a:buNone/>
+            </a:pPr>
+            <a:r>
+              <a:rPr lang="zh-CN" altLang="en-US" sz="2400" dirty="0">
+                <a:latin typeface="华文楷体" panose="02010600040101010101" pitchFamily="2" charset="-122"/>
+                <a:ea typeface="华文楷体" panose="02010600040101010101" pitchFamily="2" charset="-122"/>
+              </a:rPr>
+              <a:t>确定智能估值思路</a:t>
+            </a:r>
+            <a:r>
+              <a:rPr lang="en-US" altLang="zh-CN" sz="2400" dirty="0">
+                <a:latin typeface="华文楷体" panose="02010600040101010101" pitchFamily="2" charset="-122"/>
+                <a:ea typeface="华文楷体" panose="02010600040101010101" pitchFamily="2" charset="-122"/>
+              </a:rPr>
+              <a:t>-</a:t>
+            </a:r>
+            <a:r>
+              <a:rPr lang="zh-CN" altLang="en-US" sz="2400" dirty="0">
+                <a:latin typeface="华文楷体" panose="02010600040101010101" pitchFamily="2" charset="-122"/>
+                <a:ea typeface="华文楷体" panose="02010600040101010101" pitchFamily="2" charset="-122"/>
+              </a:rPr>
+              <a:t>收益法</a:t>
+            </a:r>
+            <a:endParaRPr lang="en-US" altLang="zh-CN" sz="2400" dirty="0">
+              <a:latin typeface="华文楷体" panose="02010600040101010101" pitchFamily="2" charset="-122"/>
+              <a:ea typeface="华文楷体" panose="02010600040101010101" pitchFamily="2" charset="-122"/>
+            </a:endParaRPr>
+          </a:p>
+          <a:p>
+            <a:pPr marL="0" indent="0">
+              <a:lnSpc>
+                <a:spcPct val="100000"/>
+              </a:lnSpc>
+              <a:spcBef>
+                <a:spcPts val="600"/>
+              </a:spcBef>
+              <a:spcAft>
+                <a:spcPts val="600"/>
+              </a:spcAft>
+              <a:buNone/>
+            </a:pPr>
+            <a:r>
+              <a:rPr lang="en-US" altLang="zh-CN" sz="2400" dirty="0">
+                <a:latin typeface="华文楷体" panose="02010600040101010101" pitchFamily="2" charset="-122"/>
+                <a:ea typeface="华文楷体" panose="02010600040101010101" pitchFamily="2" charset="-122"/>
+              </a:rPr>
+              <a:t>4</a:t>
+            </a:r>
+            <a:r>
+              <a:rPr lang="zh-CN" altLang="en-US" sz="2400" dirty="0">
+                <a:latin typeface="华文楷体" panose="02010600040101010101" pitchFamily="2" charset="-122"/>
+                <a:ea typeface="华文楷体" panose="02010600040101010101" pitchFamily="2" charset="-122"/>
+              </a:rPr>
+              <a:t>、根据智能化思路设置不同情景</a:t>
+            </a:r>
+            <a:endParaRPr lang="en-US" altLang="zh-CN" sz="2400" dirty="0">
+              <a:latin typeface="华文楷体" panose="02010600040101010101" pitchFamily="2" charset="-122"/>
+              <a:ea typeface="华文楷体" panose="02010600040101010101" pitchFamily="2" charset="-122"/>
+            </a:endParaRPr>
+          </a:p>
+          <a:p>
+            <a:pPr marL="0" indent="0">
+              <a:lnSpc>
+                <a:spcPct val="100000"/>
+              </a:lnSpc>
+              <a:spcBef>
+                <a:spcPts val="600"/>
+              </a:spcBef>
+              <a:spcAft>
+                <a:spcPts val="600"/>
+              </a:spcAft>
+              <a:buNone/>
+            </a:pPr>
+            <a:r>
+              <a:rPr lang="en-US" altLang="zh-CN" sz="2400" dirty="0">
+                <a:latin typeface="华文楷体" panose="02010600040101010101" pitchFamily="2" charset="-122"/>
+                <a:ea typeface="华文楷体" panose="02010600040101010101" pitchFamily="2" charset="-122"/>
+              </a:rPr>
+              <a:t>5</a:t>
+            </a:r>
+            <a:r>
+              <a:rPr lang="zh-CN" altLang="en-US" sz="2400" dirty="0">
+                <a:latin typeface="华文楷体" panose="02010600040101010101" pitchFamily="2" charset="-122"/>
+                <a:ea typeface="华文楷体" panose="02010600040101010101" pitchFamily="2" charset="-122"/>
+              </a:rPr>
+              <a:t>、大规模修正并处理异常情况</a:t>
+            </a:r>
+            <a:endParaRPr lang="en-US" altLang="zh-CN" sz="2400" dirty="0">
+              <a:latin typeface="华文楷体" panose="02010600040101010101" pitchFamily="2" charset="-122"/>
+              <a:ea typeface="华文楷体" panose="02010600040101010101" pitchFamily="2" charset="-122"/>
+            </a:endParaRPr>
+          </a:p>
+          <a:p>
+            <a:pPr marL="0" indent="0">
+              <a:lnSpc>
+                <a:spcPct val="100000"/>
+              </a:lnSpc>
+              <a:spcBef>
+                <a:spcPts val="600"/>
+              </a:spcBef>
+              <a:spcAft>
+                <a:spcPts val="600"/>
+              </a:spcAft>
+              <a:buNone/>
+            </a:pPr>
+            <a:endParaRPr lang="en-US" altLang="zh-CN" sz="2400" dirty="0">
+              <a:latin typeface="华文楷体" panose="02010600040101010101" pitchFamily="2" charset="-122"/>
+              <a:ea typeface="华文楷体" panose="02010600040101010101" pitchFamily="2" charset="-122"/>
+            </a:endParaRPr>
+          </a:p>
+          <a:p>
+            <a:pPr marL="0" indent="0">
+              <a:lnSpc>
+                <a:spcPct val="100000"/>
+              </a:lnSpc>
+              <a:spcBef>
+                <a:spcPts val="600"/>
+              </a:spcBef>
+              <a:spcAft>
+                <a:spcPts val="600"/>
+              </a:spcAft>
+              <a:buNone/>
+            </a:pPr>
+            <a:r>
+              <a:rPr lang="zh-CN" altLang="en-US" sz="2400" dirty="0">
+                <a:latin typeface="华文楷体" panose="02010600040101010101" pitchFamily="2" charset="-122"/>
+                <a:ea typeface="华文楷体" panose="02010600040101010101" pitchFamily="2" charset="-122"/>
+              </a:rPr>
+              <a:t>实战制作中收益法估值程序演示</a:t>
+            </a:r>
+            <a:endParaRPr lang="en-US" altLang="zh-CN" sz="2400" dirty="0">
+              <a:latin typeface="华文楷体" panose="02010600040101010101" pitchFamily="2" charset="-122"/>
+              <a:ea typeface="华文楷体" panose="02010600040101010101" pitchFamily="2" charset="-122"/>
+            </a:endParaRPr>
+          </a:p>
+        </p:txBody>
+      </p:sp>
+    </p:spTree>
+    <p:extLst>
+      <p:ext uri="{BB962C8B-B14F-4D97-AF65-F5344CB8AC3E}">
+        <p14:creationId xmlns:p14="http://schemas.microsoft.com/office/powerpoint/2010/main" val="523173828"/>
+      </p:ext>
+    </p:extLst>
+  </p:cSld>
+  <p:clrMapOvr>
+    <a:masterClrMapping/>
+  </p:clrMapOvr>
+</p:sld>
+</file>
+
+<file path=ppt/slides/slide65.xml><?xml version="1.0" encoding="utf-8"?>
+<p:sld xmlns:a="http://schemas.openxmlformats.org/drawingml/2006/main" xmlns:r="http://schemas.openxmlformats.org/officeDocument/2006/relationships" xmlns:p="http://schemas.openxmlformats.org/presentationml/2006/main">
+  <p:cSld>
+    <p:bg>
+      <p:bgPr>
+        <a:solidFill>
+          <a:srgbClr val="E9E9E9"/>
+        </a:solidFill>
+        <a:effectLst/>
+      </p:bgPr>
+    </p:bg>
+    <p:spTree>
+      <p:nvGrpSpPr>
+        <p:cNvPr id="1" name=""/>
+        <p:cNvGrpSpPr/>
+        <p:nvPr/>
+      </p:nvGrpSpPr>
+      <p:grpSpPr>
+        <a:xfrm>
+          <a:off x="0" y="0"/>
+          <a:ext cx="0" cy="0"/>
+          <a:chOff x="0" y="0"/>
+          <a:chExt cx="0" cy="0"/>
+        </a:xfrm>
+      </p:grpSpPr>
+      <p:sp>
+        <p:nvSpPr>
+          <p:cNvPr id="2" name="标题 1">
+            <a:extLst>
+              <a:ext uri="{FF2B5EF4-FFF2-40B4-BE49-F238E27FC236}">
+                <a16:creationId xmlns:a16="http://schemas.microsoft.com/office/drawing/2014/main" id="{0F617226-9F5C-45E4-B262-CCBFE1B69021}"/>
+              </a:ext>
+            </a:extLst>
+          </p:cNvPr>
+          <p:cNvSpPr>
+            <a:spLocks noGrp="1"/>
+          </p:cNvSpPr>
+          <p:nvPr>
+            <p:ph type="title"/>
+          </p:nvPr>
+        </p:nvSpPr>
+        <p:spPr/>
+        <p:txBody>
+          <a:bodyPr/>
+          <a:lstStyle/>
+          <a:p>
+            <a:r>
+              <a:rPr lang="zh-CN" altLang="en-US" dirty="0">
+                <a:latin typeface="华文楷体" panose="02010600040101010101" pitchFamily="2" charset="-122"/>
+                <a:ea typeface="华文楷体" panose="02010600040101010101" pitchFamily="2" charset="-122"/>
+              </a:rPr>
+              <a:t>智能估值概述</a:t>
+            </a:r>
+            <a:r>
+              <a:rPr lang="en-US" altLang="zh-CN" dirty="0">
+                <a:latin typeface="华文楷体" panose="02010600040101010101" pitchFamily="2" charset="-122"/>
+                <a:ea typeface="华文楷体" panose="02010600040101010101" pitchFamily="2" charset="-122"/>
+              </a:rPr>
+              <a:t>-</a:t>
+            </a:r>
+            <a:r>
+              <a:rPr lang="zh-CN" altLang="en-US" dirty="0">
+                <a:latin typeface="华文楷体" panose="02010600040101010101" pitchFamily="2" charset="-122"/>
+                <a:ea typeface="华文楷体" panose="02010600040101010101" pitchFamily="2" charset="-122"/>
+              </a:rPr>
+              <a:t>前端呈现</a:t>
+            </a:r>
+          </a:p>
+        </p:txBody>
+      </p:sp>
+      <p:sp>
+        <p:nvSpPr>
+          <p:cNvPr id="3" name="内容占位符 2"/>
+          <p:cNvSpPr>
+            <a:spLocks noGrp="1"/>
+          </p:cNvSpPr>
+          <p:nvPr>
+            <p:ph idx="1"/>
+          </p:nvPr>
+        </p:nvSpPr>
+        <p:spPr>
+          <a:xfrm>
+            <a:off x="838200" y="1825625"/>
+            <a:ext cx="10515600" cy="4667250"/>
+          </a:xfrm>
+        </p:spPr>
+        <p:txBody>
+          <a:bodyPr anchor="t">
+            <a:noAutofit/>
+          </a:bodyPr>
+          <a:lstStyle/>
+          <a:p>
+            <a:pPr>
+              <a:lnSpc>
+                <a:spcPct val="100000"/>
+              </a:lnSpc>
+              <a:spcBef>
+                <a:spcPts val="600"/>
+              </a:spcBef>
+              <a:spcAft>
+                <a:spcPts val="600"/>
+              </a:spcAft>
+            </a:pPr>
+            <a:r>
+              <a:rPr lang="en-US" altLang="zh-CN" sz="2400" dirty="0">
+                <a:latin typeface="华文楷体" panose="02010600040101010101" pitchFamily="2" charset="-122"/>
+                <a:ea typeface="华文楷体" panose="02010600040101010101" pitchFamily="2" charset="-122"/>
+              </a:rPr>
+              <a:t>1</a:t>
+            </a:r>
+            <a:r>
+              <a:rPr lang="zh-CN" altLang="en-US" sz="2400" dirty="0">
+                <a:latin typeface="华文楷体" panose="02010600040101010101" pitchFamily="2" charset="-122"/>
+                <a:ea typeface="华文楷体" panose="02010600040101010101" pitchFamily="2" charset="-122"/>
+              </a:rPr>
+              <a:t>、可视化</a:t>
+            </a:r>
+            <a:endParaRPr lang="en-US" altLang="zh-CN" sz="2400" dirty="0">
+              <a:latin typeface="华文楷体" panose="02010600040101010101" pitchFamily="2" charset="-122"/>
+              <a:ea typeface="华文楷体" panose="02010600040101010101" pitchFamily="2" charset="-122"/>
+            </a:endParaRPr>
+          </a:p>
+          <a:p>
+            <a:pPr marL="0" indent="0">
+              <a:lnSpc>
+                <a:spcPct val="100000"/>
+              </a:lnSpc>
+              <a:spcBef>
+                <a:spcPts val="600"/>
+              </a:spcBef>
+              <a:spcAft>
+                <a:spcPts val="600"/>
+              </a:spcAft>
+              <a:buNone/>
+            </a:pPr>
+            <a:r>
+              <a:rPr lang="zh-CN" altLang="en-US" sz="2400" dirty="0">
+                <a:latin typeface="华文楷体" panose="02010600040101010101" pitchFamily="2" charset="-122"/>
+                <a:ea typeface="华文楷体" panose="02010600040101010101" pitchFamily="2" charset="-122"/>
+              </a:rPr>
+              <a:t>示例</a:t>
+            </a:r>
+            <a:r>
+              <a:rPr lang="en-US" altLang="zh-CN" sz="2400" dirty="0">
+                <a:latin typeface="华文楷体" panose="02010600040101010101" pitchFamily="2" charset="-122"/>
+                <a:ea typeface="华文楷体" panose="02010600040101010101" pitchFamily="2" charset="-122"/>
+              </a:rPr>
+              <a:t>7</a:t>
+            </a:r>
+            <a:r>
+              <a:rPr lang="zh-CN" altLang="en-US" sz="2400" dirty="0">
+                <a:latin typeface="华文楷体" panose="02010600040101010101" pitchFamily="2" charset="-122"/>
+                <a:ea typeface="华文楷体" panose="02010600040101010101" pitchFamily="2" charset="-122"/>
+              </a:rPr>
+              <a:t>简化版市场法估值程序</a:t>
+            </a:r>
+            <a:r>
+              <a:rPr lang="en-US" altLang="zh-CN" sz="2400" dirty="0">
+                <a:latin typeface="华文楷体" panose="02010600040101010101" pitchFamily="2" charset="-122"/>
+                <a:ea typeface="华文楷体" panose="02010600040101010101" pitchFamily="2" charset="-122"/>
+              </a:rPr>
+              <a:t>-</a:t>
+            </a:r>
+            <a:r>
+              <a:rPr lang="zh-CN" altLang="en-US" sz="2400" dirty="0">
+                <a:latin typeface="华文楷体" panose="02010600040101010101" pitchFamily="2" charset="-122"/>
+                <a:ea typeface="华文楷体" panose="02010600040101010101" pitchFamily="2" charset="-122"/>
+              </a:rPr>
+              <a:t>可视化部分</a:t>
+            </a:r>
+            <a:endParaRPr lang="en-US" altLang="zh-CN" sz="2400" dirty="0">
+              <a:latin typeface="华文楷体" panose="02010600040101010101" pitchFamily="2" charset="-122"/>
+              <a:ea typeface="华文楷体" panose="02010600040101010101" pitchFamily="2" charset="-122"/>
+            </a:endParaRPr>
+          </a:p>
+          <a:p>
+            <a:pPr>
+              <a:lnSpc>
+                <a:spcPct val="100000"/>
+              </a:lnSpc>
+              <a:spcBef>
+                <a:spcPts val="600"/>
+              </a:spcBef>
+              <a:spcAft>
+                <a:spcPts val="600"/>
+              </a:spcAft>
+            </a:pPr>
+            <a:r>
+              <a:rPr lang="en-US" altLang="zh-CN" sz="2400" dirty="0">
+                <a:latin typeface="华文楷体" panose="02010600040101010101" pitchFamily="2" charset="-122"/>
+                <a:ea typeface="华文楷体" panose="02010600040101010101" pitchFamily="2" charset="-122"/>
+              </a:rPr>
+              <a:t>2</a:t>
+            </a:r>
+            <a:r>
+              <a:rPr lang="zh-CN" altLang="en-US" sz="2400" dirty="0">
+                <a:latin typeface="华文楷体" panose="02010600040101010101" pitchFamily="2" charset="-122"/>
+                <a:ea typeface="华文楷体" panose="02010600040101010101" pitchFamily="2" charset="-122"/>
+              </a:rPr>
+              <a:t>、文件输出</a:t>
+            </a:r>
+            <a:endParaRPr lang="en-US" altLang="zh-CN" sz="2400" dirty="0">
+              <a:latin typeface="华文楷体" panose="02010600040101010101" pitchFamily="2" charset="-122"/>
+              <a:ea typeface="华文楷体" panose="02010600040101010101" pitchFamily="2" charset="-122"/>
+            </a:endParaRPr>
+          </a:p>
+          <a:p>
+            <a:pPr marL="0" indent="0">
+              <a:lnSpc>
+                <a:spcPct val="100000"/>
+              </a:lnSpc>
+              <a:spcBef>
+                <a:spcPts val="600"/>
+              </a:spcBef>
+              <a:spcAft>
+                <a:spcPts val="600"/>
+              </a:spcAft>
+              <a:buNone/>
+            </a:pPr>
+            <a:r>
+              <a:rPr lang="zh-CN" altLang="en-US" sz="2400" dirty="0">
+                <a:latin typeface="华文楷体" panose="02010600040101010101" pitchFamily="2" charset="-122"/>
+                <a:ea typeface="华文楷体" panose="02010600040101010101" pitchFamily="2" charset="-122"/>
+              </a:rPr>
+              <a:t>示例</a:t>
+            </a:r>
+            <a:r>
+              <a:rPr lang="en-US" altLang="zh-CN" sz="2400" dirty="0">
+                <a:latin typeface="华文楷体" panose="02010600040101010101" pitchFamily="2" charset="-122"/>
+                <a:ea typeface="华文楷体" panose="02010600040101010101" pitchFamily="2" charset="-122"/>
+              </a:rPr>
+              <a:t>7</a:t>
+            </a:r>
+            <a:r>
+              <a:rPr lang="zh-CN" altLang="en-US" sz="2400" dirty="0">
+                <a:latin typeface="华文楷体" panose="02010600040101010101" pitchFamily="2" charset="-122"/>
+                <a:ea typeface="华文楷体" panose="02010600040101010101" pitchFamily="2" charset="-122"/>
+              </a:rPr>
+              <a:t>简化版市场法估值程序</a:t>
+            </a:r>
+            <a:r>
+              <a:rPr lang="en-US" altLang="zh-CN" sz="2400" dirty="0">
+                <a:latin typeface="华文楷体" panose="02010600040101010101" pitchFamily="2" charset="-122"/>
+                <a:ea typeface="华文楷体" panose="02010600040101010101" pitchFamily="2" charset="-122"/>
+              </a:rPr>
+              <a:t>-excel</a:t>
+            </a:r>
+            <a:r>
+              <a:rPr lang="zh-CN" altLang="en-US" sz="2400" dirty="0">
+                <a:latin typeface="华文楷体" panose="02010600040101010101" pitchFamily="2" charset="-122"/>
+                <a:ea typeface="华文楷体" panose="02010600040101010101" pitchFamily="2" charset="-122"/>
+              </a:rPr>
+              <a:t>输出部分</a:t>
+            </a:r>
+            <a:endParaRPr lang="en-US" altLang="zh-CN" sz="2400" dirty="0">
+              <a:latin typeface="华文楷体" panose="02010600040101010101" pitchFamily="2" charset="-122"/>
+              <a:ea typeface="华文楷体" panose="02010600040101010101" pitchFamily="2" charset="-122"/>
+            </a:endParaRPr>
+          </a:p>
+          <a:p>
+            <a:pPr marL="0" indent="0">
+              <a:lnSpc>
+                <a:spcPct val="100000"/>
+              </a:lnSpc>
+              <a:spcBef>
+                <a:spcPts val="600"/>
+              </a:spcBef>
+              <a:spcAft>
+                <a:spcPts val="600"/>
+              </a:spcAft>
+              <a:buNone/>
+            </a:pPr>
+            <a:endParaRPr lang="en-US" altLang="zh-CN" sz="2400" dirty="0">
+              <a:latin typeface="华文楷体" panose="02010600040101010101" pitchFamily="2" charset="-122"/>
+              <a:ea typeface="华文楷体" panose="02010600040101010101" pitchFamily="2" charset="-122"/>
+            </a:endParaRPr>
+          </a:p>
+          <a:p>
+            <a:pPr marL="0" indent="0">
+              <a:lnSpc>
+                <a:spcPct val="100000"/>
+              </a:lnSpc>
+              <a:spcBef>
+                <a:spcPts val="600"/>
+              </a:spcBef>
+              <a:spcAft>
+                <a:spcPts val="600"/>
+              </a:spcAft>
+              <a:buNone/>
+            </a:pPr>
+            <a:endParaRPr lang="en-US" altLang="zh-CN" sz="2400" dirty="0">
+              <a:latin typeface="华文楷体" panose="02010600040101010101" pitchFamily="2" charset="-122"/>
+              <a:ea typeface="华文楷体" panose="02010600040101010101" pitchFamily="2" charset="-122"/>
+            </a:endParaRPr>
+          </a:p>
+          <a:p>
+            <a:pPr marL="0" indent="0">
+              <a:lnSpc>
+                <a:spcPct val="100000"/>
+              </a:lnSpc>
+              <a:spcBef>
+                <a:spcPts val="600"/>
+              </a:spcBef>
+              <a:spcAft>
+                <a:spcPts val="600"/>
+              </a:spcAft>
+              <a:buNone/>
+            </a:pPr>
+            <a:endParaRPr lang="en-US" altLang="zh-CN" sz="2400" dirty="0">
+              <a:latin typeface="华文楷体" panose="02010600040101010101" pitchFamily="2" charset="-122"/>
+              <a:ea typeface="华文楷体" panose="02010600040101010101" pitchFamily="2" charset="-122"/>
+            </a:endParaRPr>
+          </a:p>
+          <a:p>
+            <a:pPr marL="0" indent="0">
+              <a:lnSpc>
+                <a:spcPct val="100000"/>
+              </a:lnSpc>
+              <a:spcBef>
+                <a:spcPts val="600"/>
+              </a:spcBef>
+              <a:spcAft>
+                <a:spcPts val="600"/>
+              </a:spcAft>
+              <a:buNone/>
+            </a:pPr>
+            <a:endParaRPr lang="en-US" altLang="zh-CN" sz="2400" dirty="0">
+              <a:latin typeface="华文楷体" panose="02010600040101010101" pitchFamily="2" charset="-122"/>
+              <a:ea typeface="华文楷体" panose="02010600040101010101" pitchFamily="2" charset="-122"/>
+            </a:endParaRPr>
+          </a:p>
+          <a:p>
+            <a:pPr marL="0" indent="0">
+              <a:lnSpc>
+                <a:spcPct val="100000"/>
+              </a:lnSpc>
+              <a:spcBef>
+                <a:spcPts val="600"/>
+              </a:spcBef>
+              <a:spcAft>
+                <a:spcPts val="600"/>
+              </a:spcAft>
+              <a:buNone/>
+            </a:pPr>
+            <a:endParaRPr lang="en-US" altLang="zh-CN" sz="2400" dirty="0">
+              <a:latin typeface="华文楷体" panose="02010600040101010101" pitchFamily="2" charset="-122"/>
+              <a:ea typeface="华文楷体" panose="02010600040101010101" pitchFamily="2" charset="-122"/>
+            </a:endParaRPr>
+          </a:p>
+          <a:p>
+            <a:pPr>
+              <a:lnSpc>
+                <a:spcPct val="100000"/>
+              </a:lnSpc>
+              <a:spcBef>
+                <a:spcPts val="600"/>
+              </a:spcBef>
+              <a:spcAft>
+                <a:spcPts val="600"/>
+              </a:spcAft>
+            </a:pPr>
+            <a:endParaRPr lang="en-US" altLang="zh-CN" sz="2400" dirty="0">
+              <a:latin typeface="华文楷体" panose="02010600040101010101" pitchFamily="2" charset="-122"/>
+              <a:ea typeface="华文楷体" panose="02010600040101010101" pitchFamily="2" charset="-122"/>
+            </a:endParaRPr>
+          </a:p>
+        </p:txBody>
+      </p:sp>
+    </p:spTree>
+    <p:extLst>
+      <p:ext uri="{BB962C8B-B14F-4D97-AF65-F5344CB8AC3E}">
+        <p14:creationId xmlns:p14="http://schemas.microsoft.com/office/powerpoint/2010/main" val="62099964"/>
+      </p:ext>
+    </p:extLst>
+  </p:cSld>
+  <p:clrMapOvr>
+    <a:overrideClrMapping bg1="lt1" tx1="dk1" bg2="lt2" tx2="dk2" accent1="accent1" accent2="accent2" accent3="accent3" accent4="accent4" accent5="accent5" accent6="accent6" hlink="hlink" folHlink="folHlink"/>
+  </p:clrMapOvr>
+</p:sld>
+</file>
+
+<file path=ppt/slides/slide66.xml><?xml version="1.0" encoding="utf-8"?>
+<p:sld xmlns:a="http://schemas.openxmlformats.org/drawingml/2006/main" xmlns:r="http://schemas.openxmlformats.org/officeDocument/2006/relationships" xmlns:p="http://schemas.openxmlformats.org/presentationml/2006/main">
+  <p:cSld>
+    <p:bg>
+      <p:bgPr>
+        <a:solidFill>
+          <a:srgbClr val="E9E9E9"/>
+        </a:solidFill>
+        <a:effectLst/>
+      </p:bgPr>
+    </p:bg>
+    <p:spTree>
+      <p:nvGrpSpPr>
+        <p:cNvPr id="1" name=""/>
+        <p:cNvGrpSpPr/>
+        <p:nvPr/>
+      </p:nvGrpSpPr>
+      <p:grpSpPr>
+        <a:xfrm>
+          <a:off x="0" y="0"/>
+          <a:ext cx="0" cy="0"/>
+          <a:chOff x="0" y="0"/>
+          <a:chExt cx="0" cy="0"/>
+        </a:xfrm>
+      </p:grpSpPr>
+      <p:sp>
+        <p:nvSpPr>
+          <p:cNvPr id="3" name="内容占位符 2"/>
+          <p:cNvSpPr>
+            <a:spLocks noGrp="1"/>
+          </p:cNvSpPr>
+          <p:nvPr>
+            <p:ph idx="1"/>
+          </p:nvPr>
+        </p:nvSpPr>
+        <p:spPr>
+          <a:xfrm>
+            <a:off x="838200" y="2367097"/>
+            <a:ext cx="10515600" cy="2123805"/>
+          </a:xfrm>
+        </p:spPr>
+        <p:txBody>
+          <a:bodyPr anchor="ctr">
+            <a:noAutofit/>
+          </a:bodyPr>
+          <a:lstStyle/>
+          <a:p>
+            <a:pPr marL="0" indent="0" algn="ctr">
+              <a:buNone/>
+            </a:pPr>
+            <a:r>
+              <a:rPr lang="en-GB" altLang="zh-CN" sz="16600" dirty="0">
+                <a:latin typeface="Edwardian Script ITC" panose="030303020407070D0804" pitchFamily="66" charset="0"/>
+              </a:rPr>
+              <a:t>Thank  you.</a:t>
+            </a:r>
+            <a:endParaRPr lang="en-GB" altLang="zh-CN" sz="9600" dirty="0"/>
+          </a:p>
+        </p:txBody>
+      </p:sp>
+    </p:spTree>
   </p:cSld>
   <p:clrMapOvr>
     <a:masterClrMapping/>
@@ -19774,4 +21496,47 @@
     </a:ext>
   </a:extLst>
 </a:theme>
+</file>
+
+<file path=ppt/theme/themeOverride1.xml><?xml version="1.0" encoding="utf-8"?>
+<a:themeOverride xmlns:a="http://schemas.openxmlformats.org/drawingml/2006/main">
+  <a:clrScheme name="Office">
+    <a:dk1>
+      <a:sysClr val="windowText" lastClr="000000"/>
+    </a:dk1>
+    <a:lt1>
+      <a:sysClr val="window" lastClr="FFFFFF"/>
+    </a:lt1>
+    <a:dk2>
+      <a:srgbClr val="44546A"/>
+    </a:dk2>
+    <a:lt2>
+      <a:srgbClr val="E7E6E6"/>
+    </a:lt2>
+    <a:accent1>
+      <a:srgbClr val="4472C4"/>
+    </a:accent1>
+    <a:accent2>
+      <a:srgbClr val="ED7D31"/>
+    </a:accent2>
+    <a:accent3>
+      <a:srgbClr val="A5A5A5"/>
+    </a:accent3>
+    <a:accent4>
+      <a:srgbClr val="FFC000"/>
+    </a:accent4>
+    <a:accent5>
+      <a:srgbClr val="5B9BD5"/>
+    </a:accent5>
+    <a:accent6>
+      <a:srgbClr val="70AD47"/>
+    </a:accent6>
+    <a:hlink>
+      <a:srgbClr val="0563C1"/>
+    </a:hlink>
+    <a:folHlink>
+      <a:srgbClr val="954F72"/>
+    </a:folHlink>
+  </a:clrScheme>
+</a:themeOverride>
 </file>